--- a/05-da-v8-introduction-python/16-python-introduction.pptx
+++ b/05-da-v8-introduction-python/16-python-introduction.pptx
@@ -161,7 +161,7 @@
                 <a:tab algn="l" pos="0"/>
               </a:tabLst>
             </a:pPr>
-            <a:fld id="{5AEA4EA1-6ABA-4B95-A8FF-0EBCF0B83266}" type="slidenum">
+            <a:fld id="{203E4DE7-7A96-4348-BB3D-7B6842018DCC}" type="slidenum">
               <a:rPr b="0" lang="en" sz="1000" strike="noStrike" u="none">
                 <a:solidFill>
                   <a:schemeClr val="dk2"/>
@@ -171,7 +171,7 @@
                 <a:latin typeface="Arial"/>
                 <a:ea typeface="Arial"/>
               </a:rPr>
-              <a:t>4</a:t>
+              <a:t>&lt;número&gt;</a:t>
             </a:fld>
             <a:endParaRPr b="0" lang="es-MX" sz="1000" strike="noStrike" u="none">
               <a:solidFill>
@@ -329,7 +329,7 @@
                 <a:tab algn="l" pos="0"/>
               </a:tabLst>
             </a:pPr>
-            <a:fld id="{A9112B79-2432-4B68-8708-E54B7D8278F8}" type="slidenum">
+            <a:fld id="{82720D77-656D-4BAB-BE2A-F97E66F6C17E}" type="slidenum">
               <a:rPr b="0" lang="en" sz="1000" strike="noStrike" u="none">
                 <a:solidFill>
                   <a:schemeClr val="dk2"/>
@@ -771,7 +771,7 @@
                 <a:tab algn="l" pos="0"/>
               </a:tabLst>
             </a:pPr>
-            <a:fld id="{9A87C393-12A9-439A-B532-27BEAE1845C6}" type="slidenum">
+            <a:fld id="{7D23F041-E32A-4159-B178-B849C25CA954}" type="slidenum">
               <a:rPr b="0" lang="en" sz="1000" strike="noStrike" u="none">
                 <a:solidFill>
                   <a:schemeClr val="dk2"/>
@@ -1487,7 +1487,7 @@
                 <a:tab algn="l" pos="0"/>
               </a:tabLst>
             </a:pPr>
-            <a:fld id="{DD12E06B-5F20-47B9-8B3E-EAB203F2C6CA}" type="slidenum">
+            <a:fld id="{C974B905-342C-4EA1-AF75-77B1E81623B2}" type="slidenum">
               <a:rPr b="0" lang="en" sz="1000" strike="noStrike" u="none">
                 <a:solidFill>
                   <a:schemeClr val="dk2"/>
@@ -1655,7 +1655,7 @@
                 <a:tab algn="l" pos="0"/>
               </a:tabLst>
             </a:pPr>
-            <a:fld id="{6A72D829-D1AD-4441-A095-EFB6456ECB3F}" type="slidenum">
+            <a:fld id="{7F98F0CA-07BB-49A3-886C-7B7FE7D0140D}" type="slidenum">
               <a:rPr b="0" lang="en" sz="1000" strike="noStrike" u="none">
                 <a:solidFill>
                   <a:schemeClr val="dk2"/>
@@ -1764,7 +1764,7 @@
                 <a:tab algn="l" pos="0"/>
               </a:tabLst>
             </a:pPr>
-            <a:fld id="{625BD021-18A4-4AE2-B005-E90563ED98DD}" type="slidenum">
+            <a:fld id="{F5E4EECA-64E0-403E-BC92-929184B6A21E}" type="slidenum">
               <a:rPr b="0" lang="en" sz="1000" strike="noStrike" u="none">
                 <a:solidFill>
                   <a:schemeClr val="dk2"/>
@@ -2754,7 +2754,7 @@
                 <a:tab algn="l" pos="0"/>
               </a:tabLst>
             </a:pPr>
-            <a:fld id="{99E98264-64CE-4D10-8376-E1AC30913E2C}" type="slidenum">
+            <a:fld id="{D9ACC553-BD9D-4150-B2DB-6DF1F201C591}" type="slidenum">
               <a:rPr b="0" lang="en" sz="1000" strike="noStrike" u="none">
                 <a:solidFill>
                   <a:schemeClr val="dk2"/>
@@ -3744,7 +3744,7 @@
                 <a:tab algn="l" pos="0"/>
               </a:tabLst>
             </a:pPr>
-            <a:fld id="{B378F8E7-BBEC-46A5-9AF1-C2633E3AC90A}" type="slidenum">
+            <a:fld id="{4A976B52-1C0E-4771-8087-81B23A7D87EC}" type="slidenum">
               <a:rPr b="0" lang="en" sz="1000" strike="noStrike" u="none">
                 <a:solidFill>
                   <a:schemeClr val="dk2"/>
@@ -4734,7 +4734,7 @@
                 <a:tab algn="l" pos="0"/>
               </a:tabLst>
             </a:pPr>
-            <a:fld id="{6C771292-2F82-461B-BDEF-AAB93753821C}" type="slidenum">
+            <a:fld id="{48F4AAA7-2396-4D0A-9949-13DDF5452590}" type="slidenum">
               <a:rPr b="0" lang="en" sz="1000" strike="noStrike" u="none">
                 <a:solidFill>
                   <a:schemeClr val="dk2"/>
@@ -5450,7 +5450,7 @@
                 <a:tab algn="l" pos="0"/>
               </a:tabLst>
             </a:pPr>
-            <a:fld id="{9532A6A9-2D02-4EA1-93A0-E8C4EDEA8682}" type="slidenum">
+            <a:fld id="{D736F38C-F669-4BB3-9884-0D12017598C2}" type="slidenum">
               <a:rPr b="0" lang="en" sz="1000" strike="noStrike" u="none">
                 <a:solidFill>
                   <a:schemeClr val="dk2"/>
@@ -6714,7 +6714,7 @@
                 <a:tab algn="l" pos="0"/>
               </a:tabLst>
             </a:pPr>
-            <a:fld id="{7190E34A-4AE3-42F6-8137-9F1DDD6CDD79}" type="slidenum">
+            <a:fld id="{5B4FA695-481E-49E9-B530-750C761E2130}" type="slidenum">
               <a:rPr b="0" lang="en" sz="1000" strike="noStrike" u="none">
                 <a:solidFill>
                   <a:schemeClr val="dk2"/>
@@ -6823,7 +6823,7 @@
                 <a:tab algn="l" pos="0"/>
               </a:tabLst>
             </a:pPr>
-            <a:fld id="{F4155CA2-5803-4DBE-BB58-2F3C98F5F270}" type="slidenum">
+            <a:fld id="{C891FC92-F516-4709-96A1-2878B7A3F707}" type="slidenum">
               <a:rPr b="0" lang="en" sz="1000" strike="noStrike" u="none">
                 <a:solidFill>
                   <a:schemeClr val="dk2"/>
@@ -6833,7 +6833,7 @@
                 <a:latin typeface="Arial"/>
                 <a:ea typeface="Arial"/>
               </a:rPr>
-              <a:t>4</a:t>
+              <a:t>&lt;número&gt;</a:t>
             </a:fld>
             <a:endParaRPr b="0" lang="es-MX" sz="1000" strike="noStrike" u="none">
               <a:solidFill>
@@ -8635,7 +8635,7 @@
                 <a:tab algn="l" pos="0"/>
               </a:tabLst>
             </a:pPr>
-            <a:fld id="{B33DBC93-4215-4C53-A4D0-47596666B232}" type="slidenum">
+            <a:fld id="{41885062-15C9-4EBC-A8CD-311F52E4A6E8}" type="slidenum">
               <a:rPr b="0" lang="en" sz="1000" strike="noStrike" u="none">
                 <a:solidFill>
                   <a:schemeClr val="dk2"/>
@@ -8744,7 +8744,7 @@
                 <a:tab algn="l" pos="0"/>
               </a:tabLst>
             </a:pPr>
-            <a:fld id="{C14BDF30-7CAA-4E59-9DC6-4BA99C338D54}" type="slidenum">
+            <a:fld id="{44FA88B9-8ECA-4160-83B5-5E10099A3A36}" type="slidenum">
               <a:rPr b="0" lang="en" sz="1000" strike="noStrike" u="none">
                 <a:solidFill>
                   <a:schemeClr val="dk2"/>
@@ -9245,7 +9245,7 @@
                 <a:tab algn="l" pos="0"/>
               </a:tabLst>
             </a:pPr>
-            <a:fld id="{F0F56033-FB73-4819-A5C4-503375726755}" type="slidenum">
+            <a:fld id="{53B52364-EB01-4F25-B82D-0FC5C6F857AC}" type="slidenum">
               <a:rPr b="0" lang="en" sz="1000" strike="noStrike" u="none">
                 <a:solidFill>
                   <a:schemeClr val="dk2"/>
@@ -9687,7 +9687,7 @@
                 <a:tab algn="l" pos="0"/>
               </a:tabLst>
             </a:pPr>
-            <a:fld id="{1C223BEA-EA55-405F-8A10-244E0AB006E2}" type="slidenum">
+            <a:fld id="{DE08681C-D124-4F4C-A41E-8A49FEE31372}" type="slidenum">
               <a:rPr b="0" lang="en" sz="1000" strike="noStrike" u="none">
                 <a:solidFill>
                   <a:schemeClr val="dk2"/>
@@ -10403,7 +10403,7 @@
                 <a:tab algn="l" pos="0"/>
               </a:tabLst>
             </a:pPr>
-            <a:fld id="{46C6C31F-44AA-4FA3-8061-06DF3B181F65}" type="slidenum">
+            <a:fld id="{1D6E5CB5-6D73-4EFF-A52D-0A5E0DD52D43}" type="slidenum">
               <a:rPr b="0" lang="en" sz="1000" strike="noStrike" u="none">
                 <a:solidFill>
                   <a:schemeClr val="dk2"/>
@@ -10462,7 +10462,7 @@
         <p:txBody>
           <a:bodyPr/>
           <a:p>
-            <a:fld id="{2CFEBA8B-D5F7-4834-AC2E-981AA15CDBC1}" type="slidenum">
+            <a:fld id="{1A6C3F54-6D82-4104-AF26-39F6CB64D7BD}" type="slidenum">
               <a:t>&lt;#&gt;</a:t>
             </a:fld>
           </a:p>
@@ -10504,7 +10504,7 @@
         <p:txBody>
           <a:bodyPr/>
           <a:p>
-            <a:fld id="{B7E884A1-93B3-41A0-B486-56E2F3C9383A}" type="slidenum">
+            <a:fld id="{6E99849C-E679-4153-8423-96B84CB7E879}" type="slidenum">
               <a:t>&lt;#&gt;</a:t>
             </a:fld>
           </a:p>
@@ -11477,7 +11477,7 @@
                 <a:tab algn="l" pos="0"/>
               </a:tabLst>
             </a:pPr>
-            <a:fld id="{00A1B5F6-399D-431F-942D-77C1ED5DCC95}" type="slidenum">
+            <a:fld id="{969F0E29-5784-4400-8865-FBDE27F4A60B}" type="slidenum">
               <a:rPr b="0" lang="en" sz="1000" strike="noStrike" u="none">
                 <a:solidFill>
                   <a:schemeClr val="dk2"/>
@@ -12467,7 +12467,7 @@
                 <a:tab algn="l" pos="0"/>
               </a:tabLst>
             </a:pPr>
-            <a:fld id="{B6C1C477-3603-4387-AD82-EB782AB9E58E}" type="slidenum">
+            <a:fld id="{81370F16-2793-4148-BBE4-46158A5D5EDE}" type="slidenum">
               <a:rPr b="0" lang="en" sz="1000" strike="noStrike" u="none">
                 <a:solidFill>
                   <a:schemeClr val="dk2"/>
@@ -13457,7 +13457,7 @@
                 <a:tab algn="l" pos="0"/>
               </a:tabLst>
             </a:pPr>
-            <a:fld id="{EC1EF852-6907-48BC-B2D6-047752DB74E6}" type="slidenum">
+            <a:fld id="{0361C2C5-DAF1-4B5C-B2B1-7F2E2764FBED}" type="slidenum">
               <a:rPr b="0" lang="en" sz="1000" strike="noStrike" u="none">
                 <a:solidFill>
                   <a:schemeClr val="dk2"/>
@@ -14173,7 +14173,7 @@
                 <a:tab algn="l" pos="0"/>
               </a:tabLst>
             </a:pPr>
-            <a:fld id="{B0E19207-FB4E-4931-A996-2C53C6C75AC8}" type="slidenum">
+            <a:fld id="{D2835019-D8A6-4682-B5D1-56C8B9BFA9CF}" type="slidenum">
               <a:rPr b="0" lang="en" sz="1000" strike="noStrike" u="none">
                 <a:solidFill>
                   <a:schemeClr val="dk2"/>
@@ -15437,7 +15437,7 @@
                 <a:tab algn="l" pos="0"/>
               </a:tabLst>
             </a:pPr>
-            <a:fld id="{95530313-4376-4B4F-991B-90502D7372D2}" type="slidenum">
+            <a:fld id="{2880855C-9AD4-4D02-A18C-41D2C9F46227}" type="slidenum">
               <a:rPr b="0" lang="en" sz="1000" strike="noStrike" u="none">
                 <a:solidFill>
                   <a:schemeClr val="dk2"/>
@@ -17249,7 +17249,7 @@
                 <a:tab algn="l" pos="0"/>
               </a:tabLst>
             </a:pPr>
-            <a:fld id="{4A0E6002-6932-45CA-84CC-F9F4C1034E3D}" type="slidenum">
+            <a:fld id="{AEE0A4EA-7EDB-46B7-85AA-3441BC4C53FB}" type="slidenum">
               <a:rPr b="0" lang="en" sz="1000" strike="noStrike" u="none">
                 <a:solidFill>
                   <a:schemeClr val="dk2"/>
@@ -17358,7 +17358,7 @@
                 <a:tab algn="l" pos="0"/>
               </a:tabLst>
             </a:pPr>
-            <a:fld id="{69FA7922-76AC-4A86-8E4C-C7B2647AFEE0}" type="slidenum">
+            <a:fld id="{211E2E6E-6018-4C39-9B2F-25B4A12C14EF}" type="slidenum">
               <a:rPr b="0" lang="en" sz="1000" strike="noStrike" u="none">
                 <a:solidFill>
                   <a:schemeClr val="dk2"/>
@@ -17541,7 +17541,7 @@
                 <a:tab algn="l" pos="0"/>
               </a:tabLst>
             </a:pPr>
-            <a:fld id="{B316C688-CA93-4AFE-81E9-B631A738DFD3}" type="slidenum">
+            <a:fld id="{67C37D52-781C-4764-ACEA-3661975151F0}" type="slidenum">
               <a:rPr b="0" lang="en" sz="1000" strike="noStrike" u="none">
                 <a:solidFill>
                   <a:schemeClr val="dk2"/>
@@ -17960,7 +17960,7 @@
                 <a:tab algn="l" pos="0"/>
               </a:tabLst>
             </a:pPr>
-            <a:fld id="{B13F0E6D-2605-4D88-B4ED-3477DC3EBF43}" type="slidenum">
+            <a:fld id="{7C949B4C-E46C-42C0-96AE-9CFFE27B3565}" type="slidenum">
               <a:rPr b="0" lang="en" sz="1000" strike="noStrike" u="none">
                 <a:solidFill>
                   <a:schemeClr val="dk2"/>
@@ -18460,7 +18460,7 @@
                 <a:tab algn="l" pos="0"/>
               </a:tabLst>
             </a:pPr>
-            <a:fld id="{74AA5609-2F8C-4AF9-8C91-02A719C63E4B}" type="datetime5">
+            <a:fld id="{76540977-4BD5-4A45-97CE-37891D87623A}" type="datetime5">
               <a:rPr b="0" lang="en" sz="1200" strike="noStrike" u="none">
                 <a:solidFill>
                   <a:srgbClr val="2a2a2a"/>
@@ -18470,7 +18470,7 @@
                 <a:latin typeface="Inter Medium"/>
                 <a:ea typeface="Inter Medium"/>
               </a:rPr>
-              <a:t>Nov 19, 2025</a:t>
+              <a:t>Nov 20, 2025</a:t>
             </a:fld>
             <a:endParaRPr b="0" lang="es-MX" sz="1200" strike="noStrike" u="none">
               <a:solidFill>
@@ -19772,7 +19772,7 @@
                 <a:latin typeface="Arial"/>
                 <a:ea typeface="Arial"/>
               </a:rPr>
-              <a:t>Conocer el uso de jupyter como entorno de trabajo en python</a:t>
+              <a:t>Cargar datos en pandas y explorarlos</a:t>
             </a:r>
             <a:endParaRPr b="0" lang="es-MX" sz="1800" strike="noStrike" u="none">
               <a:solidFill>
@@ -19837,7 +19837,7 @@
                 <a:latin typeface="Arial"/>
                 <a:ea typeface="Arial"/>
               </a:rPr>
-              <a:t>Correr códigos simples en python</a:t>
+              <a:t>Convertir el formato de los datos a uno más conviente</a:t>
             </a:r>
             <a:endParaRPr b="0" lang="es-MX" sz="1800" strike="noStrike" u="none">
               <a:solidFill>
@@ -19902,7 +19902,7 @@
                 <a:latin typeface="Arial"/>
                 <a:ea typeface="Arial"/>
               </a:rPr>
-              <a:t>Cargar datos usando pandas</a:t>
+              <a:t>Filtrar datos usando condiciones</a:t>
             </a:r>
             <a:endParaRPr b="0" lang="es-MX" sz="1800" strike="noStrike" u="none">
               <a:solidFill>
